--- a/assets/Supervision_in_der_Schule_final.pptx
+++ b/assets/Supervision_in_der_Schule_final.pptx
@@ -1545,7 +1545,7 @@
         </p:nvSpPr>
         <p:spPr>
           <a:xfrm>
-            <a:off x="7498080" y="-182880"/>
+            <a:off x="7589520" y="-274320"/>
             <a:ext cx="2011680" cy="2011680"/>
           </a:xfrm>
           <a:prstGeom prst="ellipse">
@@ -2548,7 +2548,7 @@
         </p:nvSpPr>
         <p:spPr>
           <a:xfrm>
-            <a:off x="457200" y="3721608"/>
+            <a:off x="457200" y="3777577"/>
             <a:ext cx="1417320" cy="347472"/>
           </a:xfrm>
           <a:prstGeom prst="rect">
@@ -2571,6 +2571,30 @@
                 </a:solidFill>
               </a:rPr>
               <a:t>Gruppenaufteilung</a:t>
+            </a:r>
+            <a:r>
+              <a:rPr lang="en-US" sz="1100" b="1" dirty="0">
+                <a:solidFill>
+                  <a:srgbClr val="FFFFFF"/>
+                </a:solidFill>
+              </a:rPr>
+              <a:t> </a:t>
+            </a:r>
+            <a:r>
+              <a:rPr lang="en-US" sz="1100" b="1" dirty="0" err="1">
+                <a:solidFill>
+                  <a:srgbClr val="FFFFFF"/>
+                </a:solidFill>
+              </a:rPr>
+              <a:t>im</a:t>
+            </a:r>
+            <a:r>
+              <a:rPr lang="en-US" sz="1100" b="1" dirty="0">
+                <a:solidFill>
+                  <a:srgbClr val="FFFFFF"/>
+                </a:solidFill>
+              </a:rPr>
+              <a:t> Plenum</a:t>
             </a:r>
             <a:endParaRPr lang="en-US" sz="1100" dirty="0"/>
           </a:p>
@@ -2628,7 +2652,7 @@
         </p:nvSpPr>
         <p:spPr>
           <a:xfrm>
-            <a:off x="2084832" y="3035808"/>
+            <a:off x="2098548" y="3035808"/>
             <a:ext cx="1600200" cy="1719070"/>
           </a:xfrm>
           <a:prstGeom prst="roundRect">
@@ -2724,7 +2748,7 @@
         </p:nvSpPr>
         <p:spPr>
           <a:xfrm>
-            <a:off x="2176272" y="3721608"/>
+            <a:off x="2176272" y="3831336"/>
             <a:ext cx="1417320" cy="347472"/>
           </a:xfrm>
           <a:prstGeom prst="rect">
@@ -2741,12 +2765,20 @@
               <a:buNone/>
             </a:pPr>
             <a:r>
+              <a:rPr lang="en-US" sz="1100" b="1" dirty="0" err="1">
+                <a:solidFill>
+                  <a:srgbClr val="FFFFFF"/>
+                </a:solidFill>
+              </a:rPr>
+              <a:t>Gruppenmitglied</a:t>
+            </a:r>
+            <a:r>
               <a:rPr lang="en-US" sz="1100" b="1" dirty="0">
                 <a:solidFill>
                   <a:srgbClr val="FFFFFF"/>
                 </a:solidFill>
               </a:rPr>
-              <a:t>QR-Code </a:t>
+              <a:t> </a:t>
             </a:r>
             <a:r>
               <a:rPr lang="en-US" sz="1100" b="1" dirty="0" err="1">
@@ -2754,7 +2786,31 @@
                   <a:srgbClr val="FFFFFF"/>
                 </a:solidFill>
               </a:rPr>
-              <a:t>scannen</a:t>
+              <a:t>mit</a:t>
+            </a:r>
+            <a:r>
+              <a:rPr lang="en-US" sz="1100" b="1" dirty="0">
+                <a:solidFill>
+                  <a:srgbClr val="FFFFFF"/>
+                </a:solidFill>
+              </a:rPr>
+              <a:t> Laptop </a:t>
+            </a:r>
+            <a:r>
+              <a:rPr lang="en-US" sz="1100" b="1" dirty="0" err="1">
+                <a:solidFill>
+                  <a:srgbClr val="FFFFFF"/>
+                </a:solidFill>
+              </a:rPr>
+              <a:t>öffnet</a:t>
+            </a:r>
+            <a:r>
+              <a:rPr lang="en-US" sz="1100" b="1" dirty="0">
+                <a:solidFill>
+                  <a:srgbClr val="FFFFFF"/>
+                </a:solidFill>
+              </a:rPr>
+              <a:t> den Link in Moodle</a:t>
             </a:r>
             <a:endParaRPr lang="en-US" sz="1100" dirty="0"/>
           </a:p>
@@ -2768,7 +2824,7 @@
         </p:nvSpPr>
         <p:spPr>
           <a:xfrm>
-            <a:off x="2176272" y="4087368"/>
+            <a:off x="2189988" y="4238243"/>
             <a:ext cx="1417320" cy="347472"/>
           </a:xfrm>
           <a:prstGeom prst="rect">
@@ -3192,7 +3248,7 @@
         </p:nvSpPr>
         <p:spPr>
           <a:xfrm>
-            <a:off x="5614416" y="4087368"/>
+            <a:off x="5617254" y="4185666"/>
             <a:ext cx="1417320" cy="347472"/>
           </a:xfrm>
           <a:prstGeom prst="rect">
@@ -3209,12 +3265,20 @@
               <a:buNone/>
             </a:pPr>
             <a:r>
+              <a:rPr lang="en-US" sz="950" i="1" dirty="0">
+                <a:solidFill>
+                  <a:srgbClr val="A8D5D0"/>
+                </a:solidFill>
+              </a:rPr>
+              <a:t>Ink. </a:t>
+            </a:r>
+            <a:r>
               <a:rPr lang="en-US" sz="950" i="1" dirty="0" err="1">
                 <a:solidFill>
                   <a:srgbClr val="A8D5D0"/>
                 </a:solidFill>
               </a:rPr>
-              <a:t>Kieler</a:t>
+              <a:t>Gestaltung</a:t>
             </a:r>
             <a:r>
               <a:rPr lang="en-US" sz="950" i="1" dirty="0">
@@ -3230,7 +3294,7 @@
                   <a:srgbClr val="A8D5D0"/>
                 </a:solidFill>
               </a:rPr>
-              <a:t>Supervisionsmodell</a:t>
+              <a:t>einer</a:t>
             </a:r>
             <a:r>
               <a:rPr lang="en-US" sz="950" i="1" dirty="0">
@@ -3238,7 +3302,7 @@
                   <a:srgbClr val="A8D5D0"/>
                 </a:solidFill>
               </a:rPr>
-              <a:t> (</a:t>
+              <a:t> </a:t>
             </a:r>
             <a:r>
               <a:rPr lang="en-US" sz="950" i="1" dirty="0" err="1">
@@ -3246,7 +3310,7 @@
                   <a:srgbClr val="A8D5D0"/>
                 </a:solidFill>
               </a:rPr>
-              <a:t>didaktisch</a:t>
+              <a:t>Präsentation</a:t>
             </a:r>
             <a:r>
               <a:rPr lang="en-US" sz="950" i="1" dirty="0">
@@ -3254,23 +3318,7 @@
                   <a:srgbClr val="A8D5D0"/>
                 </a:solidFill>
               </a:rPr>
-              <a:t> </a:t>
-            </a:r>
-            <a:r>
-              <a:rPr lang="en-US" sz="950" i="1" dirty="0" err="1">
-                <a:solidFill>
-                  <a:srgbClr val="A8D5D0"/>
-                </a:solidFill>
-              </a:rPr>
-              <a:t>reduziert</a:t>
-            </a:r>
-            <a:r>
-              <a:rPr lang="en-US" sz="950" i="1" dirty="0">
-                <a:solidFill>
-                  <a:srgbClr val="A8D5D0"/>
-                </a:solidFill>
-              </a:rPr>
-              <a:t>)</a:t>
+              <a:t> und Feedback)</a:t>
             </a:r>
             <a:endParaRPr lang="en-US" sz="950" dirty="0"/>
           </a:p>
@@ -3809,7 +3857,7 @@
         </p:nvSpPr>
         <p:spPr>
           <a:xfrm>
-            <a:off x="3728838" y="739980"/>
+            <a:off x="3173667" y="2077974"/>
             <a:ext cx="8412480" cy="548640"/>
           </a:xfrm>
           <a:prstGeom prst="rect">
@@ -3826,6 +3874,17 @@
               <a:buNone/>
             </a:pPr>
             <a:r>
+              <a:rPr lang="en-US" sz="2800" b="1" dirty="0" err="1">
+                <a:solidFill>
+                  <a:srgbClr val="FFFFFF"/>
+                </a:solidFill>
+                <a:latin typeface="Calibri" pitchFamily="34" charset="0"/>
+                <a:ea typeface="Calibri" pitchFamily="34" charset="-122"/>
+                <a:cs typeface="Calibri" pitchFamily="34" charset="-120"/>
+              </a:rPr>
+              <a:t>Simulationsphase</a:t>
+            </a:r>
+            <a:r>
               <a:rPr lang="en-US" sz="2800" b="1" dirty="0">
                 <a:solidFill>
                   <a:srgbClr val="FFFFFF"/>
@@ -3834,7 +3893,45 @@
                 <a:ea typeface="Calibri" pitchFamily="34" charset="-122"/>
                 <a:cs typeface="Calibri" pitchFamily="34" charset="-120"/>
               </a:rPr>
-              <a:t>QR-Code</a:t>
+              <a:t> </a:t>
+            </a:r>
+          </a:p>
+          <a:p>
+            <a:pPr marL="0" indent="0">
+              <a:buNone/>
+            </a:pPr>
+            <a:r>
+              <a:rPr lang="en-US" sz="2800" b="1" dirty="0">
+                <a:solidFill>
+                  <a:srgbClr val="FFFFFF"/>
+                </a:solidFill>
+                <a:latin typeface="Calibri" pitchFamily="34" charset="0"/>
+                <a:ea typeface="Calibri" pitchFamily="34" charset="-122"/>
+                <a:cs typeface="Calibri" pitchFamily="34" charset="-120"/>
+              </a:rPr>
+              <a:t> (ca. 30 </a:t>
+            </a:r>
+            <a:r>
+              <a:rPr lang="en-US" sz="2800" b="1" dirty="0" err="1">
+                <a:solidFill>
+                  <a:srgbClr val="FFFFFF"/>
+                </a:solidFill>
+                <a:latin typeface="Calibri" pitchFamily="34" charset="0"/>
+                <a:ea typeface="Calibri" pitchFamily="34" charset="-122"/>
+                <a:cs typeface="Calibri" pitchFamily="34" charset="-120"/>
+              </a:rPr>
+              <a:t>Minuten</a:t>
+            </a:r>
+            <a:r>
+              <a:rPr lang="en-US" sz="2800" b="1" dirty="0">
+                <a:solidFill>
+                  <a:srgbClr val="FFFFFF"/>
+                </a:solidFill>
+                <a:latin typeface="Calibri" pitchFamily="34" charset="0"/>
+                <a:ea typeface="Calibri" pitchFamily="34" charset="-122"/>
+                <a:cs typeface="Calibri" pitchFamily="34" charset="-120"/>
+              </a:rPr>
+              <a:t>)</a:t>
             </a:r>
             <a:endParaRPr lang="en-US" sz="2800" dirty="0"/>
           </a:p>
@@ -3876,39 +3973,6 @@
           </a:p>
         </p:txBody>
       </p:sp>
-      <p:pic>
-        <p:nvPicPr>
-          <p:cNvPr id="44" name="Grafik 43">
-            <a:extLst>
-              <a:ext uri="{FF2B5EF4-FFF2-40B4-BE49-F238E27FC236}">
-                <a16:creationId xmlns:a16="http://schemas.microsoft.com/office/drawing/2014/main" id="{9D13A487-FDC3-4BB4-A06E-B19BA4F9D931}"/>
-              </a:ext>
-            </a:extLst>
-          </p:cNvPr>
-          <p:cNvPicPr>
-            <a:picLocks noChangeAspect="1"/>
-          </p:cNvPicPr>
-          <p:nvPr/>
-        </p:nvPicPr>
-        <p:blipFill>
-          <a:blip r:embed="rId3"/>
-          <a:stretch>
-            <a:fillRect/>
-          </a:stretch>
-        </p:blipFill>
-        <p:spPr>
-          <a:xfrm>
-            <a:off x="3106916" y="1398348"/>
-            <a:ext cx="2838728" cy="2838728"/>
-          </a:xfrm>
-          <a:prstGeom prst="rect">
-            <a:avLst/>
-          </a:prstGeom>
-          <a:effectLst>
-            <a:softEdge rad="177800"/>
-          </a:effectLst>
-        </p:spPr>
-      </p:pic>
       <p:sp>
         <p:nvSpPr>
           <p:cNvPr id="45" name="Shape 0">
@@ -12356,7 +12420,51 @@
                 <a:ea typeface="Calibri" pitchFamily="34" charset="-122"/>
                 <a:cs typeface="Calibri" pitchFamily="34" charset="-120"/>
               </a:rPr>
-              <a:t>Keine Randomisierung, nur zwei Messzeitpunkte – daher keine Kausalität, aber wertvolle erste Hinweise auf Wirksamkeit.</a:t>
+              <a:t>Keine Randomisierung, nur </a:t>
+            </a:r>
+            <a:r>
+              <a:rPr lang="en-US" sz="1200" dirty="0" err="1">
+                <a:solidFill>
+                  <a:srgbClr val="6B5420"/>
+                </a:solidFill>
+                <a:latin typeface="Calibri" pitchFamily="34" charset="0"/>
+                <a:ea typeface="Calibri" pitchFamily="34" charset="-122"/>
+                <a:cs typeface="Calibri" pitchFamily="34" charset="-120"/>
+              </a:rPr>
+              <a:t>zwei</a:t>
+            </a:r>
+            <a:r>
+              <a:rPr lang="en-US" sz="1200" dirty="0">
+                <a:solidFill>
+                  <a:srgbClr val="6B5420"/>
+                </a:solidFill>
+                <a:latin typeface="Calibri" pitchFamily="34" charset="0"/>
+                <a:ea typeface="Calibri" pitchFamily="34" charset="-122"/>
+                <a:cs typeface="Calibri" pitchFamily="34" charset="-120"/>
+              </a:rPr>
+              <a:t> </a:t>
+            </a:r>
+            <a:r>
+              <a:rPr lang="en-US" sz="1200" dirty="0" err="1">
+                <a:solidFill>
+                  <a:srgbClr val="6B5420"/>
+                </a:solidFill>
+                <a:latin typeface="Calibri" pitchFamily="34" charset="0"/>
+                <a:ea typeface="Calibri" pitchFamily="34" charset="-122"/>
+                <a:cs typeface="Calibri" pitchFamily="34" charset="-120"/>
+              </a:rPr>
+              <a:t>Messzeitpunkte</a:t>
+            </a:r>
+            <a:r>
+              <a:rPr lang="en-US" sz="1200" dirty="0">
+                <a:solidFill>
+                  <a:srgbClr val="6B5420"/>
+                </a:solidFill>
+                <a:latin typeface="Calibri" pitchFamily="34" charset="0"/>
+                <a:ea typeface="Calibri" pitchFamily="34" charset="-122"/>
+                <a:cs typeface="Calibri" pitchFamily="34" charset="-120"/>
+              </a:rPr>
+              <a:t>. Daher keine Kausalität, aber wertvolle erste Hinweise auf Wirksamkeit.</a:t>
             </a:r>
             <a:endParaRPr lang="en-US" sz="1200" dirty="0"/>
           </a:p>
